--- a/slides/week10/ch09_eta.pptx
+++ b/slides/week10/ch09_eta.pptx
@@ -26,6 +26,7 @@
     <p:sldId id="274" r:id="rId25"/>
     <p:sldId id="275" r:id="rId26"/>
     <p:sldId id="276" r:id="rId27"/>
+    <p:sldId id="277" r:id="rId28"/>
   </p:sldIdLst>
   <p:notesMasterIdLst>
     <p:notesMasterId r:id="rId15"/>
@@ -591,7 +592,7 @@
           <a:lstStyle/>
           <a:p>
             <a:r>
-              <a:t>이 모델을 만든 이유는 정확도가 아니라 속도다. 거래를 받아들일지는 용도에 달렸다.</a:t>
+              <a:t>4장에서 확인한 62% 차이는 특정 구간의 이야기다. 무작위 출발지와 목적지 쌍의 대부분은 이면도로를 쓰는 짧은 통행이고, 이면도로는 시간대별 속도 차이가 작다.</a:t>
             </a:r>
           </a:p>
         </p:txBody>
@@ -661,7 +662,7 @@
           <a:lstStyle/>
           <a:p>
             <a:r>
-              <a:t>강 건너편이거나 산을 우회해야 하는 경우다. 좌표만 확인하는 모델이 이것을 알아내기 어렵다. 개선하려면 두 지점 사이의 장애물 여부를 알려 주는 특징이 필요하고, 연습 9.3에서 시도한다.</a:t>
+              <a:t>이 모델을 만든 이유는 정확도가 아니라 속도다. 거래를 받아들일지는 용도에 달렸다.</a:t>
             </a:r>
           </a:p>
         </p:txBody>
@@ -731,7 +732,7 @@
           <a:lstStyle/>
           <a:p>
             <a:r>
-              <a:t>원 위의 값은 사인과 코사인 두 개로 분해해 넣는다는 점도 다시 언급한다. 오후에는 이 예측을 배차 비용행렬에 넣는다.</a:t>
+              <a:t>강 건너편이거나 산을 우회해야 하는 경우다. 좌표만 확인하는 모델이 이것을 알아내기 어렵다. 개선하려면 두 지점 사이의 장애물 여부를 알려 주는 특징이 필요하고, 연습 9.3에서 시도한다.</a:t>
             </a:r>
           </a:p>
         </p:txBody>
@@ -801,6 +802,76 @@
           <a:lstStyle/>
           <a:p>
             <a:r>
+              <a:t>원 위의 값은 사인과 코사인 두 개로 분해해 넣는다는 점도 다시 언급한다. 오후에는 이 예측을 배차 비용행렬에 넣는다.</a:t>
+            </a:r>
+          </a:p>
+        </p:txBody>
+      </p:sp>
+      <p:sp>
+        <p:nvSpPr>
+          <p:cNvPr id="4" name="Slide Number Placeholder 3"/>
+          <p:cNvSpPr>
+            <a:spLocks noGrp="1"/>
+          </p:cNvSpPr>
+          <p:nvPr>
+            <p:ph type="sldNum" idx="5" sz="quarter"/>
+          </p:nvPr>
+        </p:nvSpPr>
+        <p:spPr/>
+      </p:sp>
+    </p:spTree>
+  </p:cSld>
+  <p:clrMapOvr>
+    <a:masterClrMapping/>
+  </p:clrMapOvr>
+</p:notes>
+</file>
+
+<file path=ppt/notesSlides/notesSlide14.xml><?xml version="1.0" encoding="utf-8"?>
+<p:notes xmlns:a="http://schemas.openxmlformats.org/drawingml/2006/main" xmlns:p="http://schemas.openxmlformats.org/presentationml/2006/main" xmlns:r="http://schemas.openxmlformats.org/officeDocument/2006/relationships">
+  <p:cSld>
+    <p:spTree>
+      <p:nvGrpSpPr>
+        <p:cNvPr id="1" name=""/>
+        <p:cNvGrpSpPr/>
+        <p:nvPr/>
+      </p:nvGrpSpPr>
+      <p:grpSpPr>
+        <a:xfrm>
+          <a:off x="0" y="0"/>
+          <a:ext cx="0" cy="0"/>
+          <a:chOff x="0" y="0"/>
+          <a:chExt cx="0" cy="0"/>
+        </a:xfrm>
+      </p:grpSpPr>
+      <p:sp>
+        <p:nvSpPr>
+          <p:cNvPr id="2" name="Slide Image Placeholder 1"/>
+          <p:cNvSpPr>
+            <a:spLocks noGrp="1"/>
+          </p:cNvSpPr>
+          <p:nvPr>
+            <p:ph type="sldImg" idx="2"/>
+          </p:nvPr>
+        </p:nvSpPr>
+        <p:spPr/>
+      </p:sp>
+      <p:sp>
+        <p:nvSpPr>
+          <p:cNvPr id="3" name="Notes Placeholder 2"/>
+          <p:cNvSpPr>
+            <a:spLocks noGrp="1"/>
+          </p:cNvSpPr>
+          <p:nvPr>
+            <p:ph type="body" idx="3" sz="quarter"/>
+          </p:nvPr>
+        </p:nvSpPr>
+        <p:spPr/>
+        <p:txBody>
+          <a:bodyPr/>
+          <a:lstStyle/>
+          <a:p>
+            <a:r>
               <a:t>연습 9.3에서는 특징 계산 비용도 함께 측정한다. 모델을 쓰는 이유가 속도였으므로 특징 계산이 라우팅만큼 비싸지면 의미가 없다.</a:t>
             </a:r>
           </a:p>
@@ -1011,7 +1082,7 @@
           <a:lstStyle/>
           <a:p>
             <a:r>
-              <a:t>학습에 쓴 데이터로 평가하면 외운 것과 이해한 것을 구분할 수 없다. 데이터 생성은 약 3분이 걸려서 미리 만들어 저장해 두었다.</a:t>
+              <a:t>슬라이드는 개요만 다룬다. 세부 내용과 코드는 교재 원고와 실습 노트북에서 확인한다. 교재 저장소는 비공개이므로 초대받은 계정으로 로그인한 상태여야 주소가 열린다.</a:t>
             </a:r>
           </a:p>
         </p:txBody>
@@ -1081,7 +1152,7 @@
           <a:lstStyle/>
           <a:p>
             <a:r>
-              <a:t>예측할 때 얻을 수 없는 값을 특징에 넣으면 안 된다. 이것이 이 절의 요점이고 기말 프로젝트에서도 반복된다.</a:t>
+              <a:t>학습에 쓴 데이터로 평가하면 외운 것과 이해한 것을 구분할 수 없다. 데이터 생성은 약 3분이 걸려서 미리 만들어 저장해 두었다.</a:t>
             </a:r>
           </a:p>
         </p:txBody>
@@ -1151,7 +1222,7 @@
           <a:lstStyle/>
           <a:p>
             <a:r>
-              <a:t>기준선을 먼저 정한다. 기준선보다 못하면 그 모델은 쓸모가 없다.</a:t>
+              <a:t>예측할 때 얻을 수 없는 값을 특징에 넣으면 안 된다. 이것이 이 절의 요점이고 기말 프로젝트에서도 반복된다.</a:t>
             </a:r>
           </a:p>
         </p:txBody>
@@ -1221,7 +1292,7 @@
           <a:lstStyle/>
           <a:p>
             <a:r>
-              <a:t>위도가 0.01 올라갈 때 시간이 항상 같은 만큼 늘지 않는다. 시가지에서는 신호가 여럿이고 외곽에서는 도로가 뚫려 있다.</a:t>
+              <a:t>기준선을 먼저 정한다. 기준선보다 못하면 그 모델은 쓸모가 없다.</a:t>
             </a:r>
           </a:p>
         </p:txBody>
@@ -1291,7 +1362,7 @@
           <a:lstStyle/>
           <a:p>
             <a:r>
-              <a:t>얽힌 조건을 자연스럽게 표현하는 것이 나무 계열 모델의 장점이다. 이 부분은 다른 과목에서 더 자세히 다룬다.</a:t>
+              <a:t>위도가 0.01 올라갈 때 시간이 항상 같은 만큼 늘지 않는다. 시가지에서는 신호가 여럿이고 외곽에서는 도로가 뚫려 있다.</a:t>
             </a:r>
           </a:p>
         </p:txBody>
@@ -1361,7 +1432,7 @@
           <a:lstStyle/>
           <a:p>
             <a:r>
-              <a:t>4장에서 확인한 62% 차이는 특정 구간의 이야기다. 무작위 출발지와 목적지 쌍의 대부분은 이면도로를 쓰는 짧은 통행이고, 이면도로는 시간대별 속도 차이가 작다.</a:t>
+              <a:t>얽힌 조건을 자연스럽게 표현하는 것이 나무 계열 모델의 장점이다. 이 부분은 다른 과목에서 더 자세히 다룬다.</a:t>
             </a:r>
           </a:p>
         </p:txBody>
@@ -4996,12 +5067,12 @@
       <p:grpSpPr/>
       <p:sp>
         <p:nvSpPr>
-          <p:cNvPr id="2" name="Title 1"/>
-          <p:cNvSpPr>
-            <a:spLocks noGrp="1"/>
-          </p:cNvSpPr>
-          <p:nvPr>
-            <p:ph type="title" idx="100"/>
+          <p:cNvPr id="2" name="Text Placeholder 1"/>
+          <p:cNvSpPr>
+            <a:spLocks noGrp="1"/>
+          </p:cNvSpPr>
+          <p:nvPr>
+            <p:ph type="body" idx="100"/>
           </p:nvPr>
         </p:nvSpPr>
         <p:spPr/>
@@ -5010,19 +5081,19 @@
           <a:lstStyle/>
           <a:p>
             <a:r>
-              <a:t>3.1 기준선과 평가 지표</a:t>
-            </a:r>
-          </a:p>
-        </p:txBody>
-      </p:sp>
-      <p:sp>
-        <p:nvSpPr>
-          <p:cNvPr id="3" name="Text Placeholder 2"/>
-          <p:cNvSpPr>
-            <a:spLocks noGrp="1"/>
-          </p:cNvSpPr>
-          <p:nvPr>
-            <p:ph type="body" idx="101"/>
+              <a:t>03</a:t>
+            </a:r>
+          </a:p>
+        </p:txBody>
+      </p:sp>
+      <p:sp>
+        <p:nvSpPr>
+          <p:cNvPr id="3" name="Title 2"/>
+          <p:cNvSpPr>
+            <a:spLocks noGrp="1"/>
+          </p:cNvSpPr>
+          <p:nvPr>
+            <p:ph type="title" idx="101"/>
           </p:nvPr>
         </p:nvSpPr>
         <p:spPr/>
@@ -5031,7 +5102,7 @@
           <a:lstStyle/>
           <a:p>
             <a:r>
-              <a:t>3. 교재 9.2–9.3 기준선과 선형회귀</a:t>
+              <a:t>교재 9.2–9.3 기준선과 선형회귀</a:t>
             </a:r>
           </a:p>
         </p:txBody>
@@ -5051,76 +5122,40 @@
           <a:bodyPr/>
           <a:lstStyle/>
           <a:p>
-            <a:pPr/>
-            <a:r>
-              <a:t>기준선: 직선거리를 평균 속도로 나눈 값</a:t>
-            </a:r>
-          </a:p>
-          <a:p>
-            <a:pPr/>
-            <a:r>
-              <a:t>기준선 성능 MAE 2.52분 — 평균 통행 11.8분 대비 20% 초과 오차</a:t>
-            </a:r>
-          </a:p>
-          <a:p>
-            <a:pPr/>
-            <a:r>
-              <a:t>MAE(평균절대오차) — 평균 몇 분 틀리는지, 단위가 분이라 바로 해석</a:t>
-            </a:r>
-          </a:p>
-          <a:p>
-            <a:pPr/>
-            <a:r>
-              <a:t>R²(결정계수) — 정답 변동의 설명 비율, 0이면 평균값 응답과 동일</a:t>
-            </a:r>
-          </a:p>
-        </p:txBody>
-      </p:sp>
-      <p:sp>
-        <p:nvSpPr>
-          <p:cNvPr id="25" name="Slide Number Placeholder 0"/>
-          <p:cNvSpPr>
-            <a:spLocks noGrp="1"/>
-          </p:cNvSpPr>
-          <p:nvPr>
-            <p:ph type="sldNum" sz="quarter" idx="4294967295"/>
-          </p:nvPr>
-        </p:nvSpPr>
-        <p:spPr>
-          <a:xfrm>
-            <a:off x="10591495" y="6355080"/>
-            <a:ext cx="914400" cy="274320"/>
-          </a:xfrm>
-          <a:prstGeom prst="rect">
-            <a:avLst/>
-          </a:prstGeom>
-          <a:extLst>
-            <a:ext uri="{C572A759-6A51-4108-AA02-DFA0A04FC94B}">
-              <ma14:wrappingTextBoxFlag xmlns:ma14="http://schemas.microsoft.com/office/mac/drawingml/2011/main" val="0"/>
-            </a:ext>
-          </a:extLst>
-        </p:spPr>
-        <p:txBody>
-          <a:bodyPr/>
-          <a:lstStyle>
-            <a:lvl1pPr>
-              <a:defRPr sz="1000">
+            <a:pPr>
+              <a:spcAft>
+                <a:spcPts val="1000"/>
+              </a:spcAft>
+            </a:pPr>
+            <a:r>
+              <a:rPr>
                 <a:solidFill>
                   <a:srgbClr val="AFAFAF"/>
                 </a:solidFill>
-                <a:latin typeface="Pretendard Medium"/>
-                <a:ea typeface="Pretendard Medium"/>
-                <a:cs typeface="Pretendard Medium"/>
-              </a:defRPr>
-            </a:lvl1pPr>
-          </a:lstStyle>
-          <a:p>
-            <a:pPr algn="r"/>
-            <a:fld id="{F7021451-1387-4CA6-816F-3879F97B5CBC}" type="slidenum">
-              <a:rPr b="0" lang="en-US"/>
-              <a:t>1004</a:t>
-            </a:fld>
-            <a:endParaRPr lang="en-US"/>
+              </a:rPr>
+              <a:t>3.1  </a:t>
+            </a:r>
+            <a:r>
+              <a:t>기준선과 평가 지표</a:t>
+            </a:r>
+          </a:p>
+          <a:p>
+            <a:pPr>
+              <a:spcAft>
+                <a:spcPts val="1000"/>
+              </a:spcAft>
+            </a:pPr>
+            <a:r>
+              <a:rPr>
+                <a:solidFill>
+                  <a:srgbClr val="AFAFAF"/>
+                </a:solidFill>
+              </a:rPr>
+              <a:t>3.2  </a:t>
+            </a:r>
+            <a:r>
+              <a:t>선형회귀의 한계</a:t>
+            </a:r>
           </a:p>
         </p:txBody>
       </p:sp>
@@ -5158,6 +5193,154 @@
           <a:lstStyle/>
           <a:p>
             <a:r>
+              <a:t>3.1 기준선과 평가 지표</a:t>
+            </a:r>
+          </a:p>
+        </p:txBody>
+      </p:sp>
+      <p:sp>
+        <p:nvSpPr>
+          <p:cNvPr id="3" name="Text Placeholder 2"/>
+          <p:cNvSpPr>
+            <a:spLocks noGrp="1"/>
+          </p:cNvSpPr>
+          <p:nvPr>
+            <p:ph type="body" idx="101"/>
+          </p:nvPr>
+        </p:nvSpPr>
+        <p:spPr/>
+        <p:txBody>
+          <a:bodyPr/>
+          <a:lstStyle/>
+          <a:p>
+            <a:r>
+              <a:t>3. 교재 9.2–9.3 기준선과 선형회귀</a:t>
+            </a:r>
+          </a:p>
+        </p:txBody>
+      </p:sp>
+      <p:sp>
+        <p:nvSpPr>
+          <p:cNvPr id="4" name="Text Placeholder 3"/>
+          <p:cNvSpPr>
+            <a:spLocks noGrp="1"/>
+          </p:cNvSpPr>
+          <p:nvPr>
+            <p:ph type="body" idx="102"/>
+          </p:nvPr>
+        </p:nvSpPr>
+        <p:spPr/>
+        <p:txBody>
+          <a:bodyPr/>
+          <a:lstStyle/>
+          <a:p>
+            <a:pPr/>
+            <a:r>
+              <a:t>기준선: 직선거리를 평균 속도로 나눈 값</a:t>
+            </a:r>
+          </a:p>
+          <a:p>
+            <a:pPr/>
+            <a:r>
+              <a:t>기준선 성능 MAE 2.52분 — 평균 통행 11.8분 대비 20% 초과 오차</a:t>
+            </a:r>
+          </a:p>
+          <a:p>
+            <a:pPr/>
+            <a:r>
+              <a:t>MAE(평균절대오차) — 평균 몇 분 틀리는지, 단위가 분이라 바로 해석</a:t>
+            </a:r>
+          </a:p>
+          <a:p>
+            <a:pPr/>
+            <a:r>
+              <a:t>R²(결정계수) — 정답 변동의 설명 비율, 0이면 평균값 응답과 동일</a:t>
+            </a:r>
+          </a:p>
+        </p:txBody>
+      </p:sp>
+      <p:sp>
+        <p:nvSpPr>
+          <p:cNvPr id="25" name="Slide Number Placeholder 0"/>
+          <p:cNvSpPr>
+            <a:spLocks noGrp="1"/>
+          </p:cNvSpPr>
+          <p:nvPr>
+            <p:ph type="sldNum" sz="quarter" idx="4294967295"/>
+          </p:nvPr>
+        </p:nvSpPr>
+        <p:spPr>
+          <a:xfrm>
+            <a:off x="10591495" y="6355080"/>
+            <a:ext cx="914400" cy="274320"/>
+          </a:xfrm>
+          <a:prstGeom prst="rect">
+            <a:avLst/>
+          </a:prstGeom>
+          <a:extLst>
+            <a:ext uri="{C572A759-6A51-4108-AA02-DFA0A04FC94B}">
+              <ma14:wrappingTextBoxFlag xmlns:ma14="http://schemas.microsoft.com/office/mac/drawingml/2011/main" val="0"/>
+            </a:ext>
+          </a:extLst>
+        </p:spPr>
+        <p:txBody>
+          <a:bodyPr/>
+          <a:lstStyle>
+            <a:lvl1pPr>
+              <a:defRPr sz="1000">
+                <a:solidFill>
+                  <a:srgbClr val="AFAFAF"/>
+                </a:solidFill>
+                <a:latin typeface="Pretendard Medium"/>
+                <a:ea typeface="Pretendard Medium"/>
+                <a:cs typeface="Pretendard Medium"/>
+              </a:defRPr>
+            </a:lvl1pPr>
+          </a:lstStyle>
+          <a:p>
+            <a:pPr algn="r"/>
+            <a:fld id="{F7021451-1387-4CA6-816F-3879F97B5CBC}" type="slidenum">
+              <a:rPr b="0" lang="en-US"/>
+              <a:t>1004</a:t>
+            </a:fld>
+            <a:endParaRPr lang="en-US"/>
+          </a:p>
+        </p:txBody>
+      </p:sp>
+    </p:spTree>
+  </p:cSld>
+  <p:clrMapOvr>
+    <a:masterClrMapping/>
+  </p:clrMapOvr>
+</p:sld>
+</file>
+
+<file path=ppt/slides/slide12.xml><?xml version="1.0" encoding="utf-8"?>
+<p:sld xmlns:a="http://schemas.openxmlformats.org/drawingml/2006/main" xmlns:p="http://schemas.openxmlformats.org/presentationml/2006/main" xmlns:r="http://schemas.openxmlformats.org/officeDocument/2006/relationships">
+  <p:cSld>
+    <p:spTree>
+      <p:nvGrpSpPr>
+        <p:cNvPr id="1" name=""/>
+        <p:cNvGrpSpPr/>
+        <p:nvPr/>
+      </p:nvGrpSpPr>
+      <p:grpSpPr/>
+      <p:sp>
+        <p:nvSpPr>
+          <p:cNvPr id="2" name="Title 1"/>
+          <p:cNvSpPr>
+            <a:spLocks noGrp="1"/>
+          </p:cNvSpPr>
+          <p:nvPr>
+            <p:ph type="title" idx="100"/>
+          </p:nvPr>
+        </p:nvSpPr>
+        <p:spPr/>
+        <p:txBody>
+          <a:bodyPr/>
+          <a:lstStyle/>
+          <a:p>
+            <a:r>
               <a:t>3.2 선형회귀의 한계</a:t>
             </a:r>
           </a:p>
@@ -5240,7 +5423,7 @@
           <a:lstStyle/>
           <a:p>
             <a:r>
-              <a:t>표 2. 모델별 성능 비교</a:t>
+              <a:t>표 3. 모델별 성능 비교</a:t>
             </a:r>
           </a:p>
         </p:txBody>
@@ -5619,118 +5802,6 @@
 </p:sld>
 </file>
 
-<file path=ppt/slides/slide12.xml><?xml version="1.0" encoding="utf-8"?>
-<p:sld xmlns:a="http://schemas.openxmlformats.org/drawingml/2006/main" xmlns:p="http://schemas.openxmlformats.org/presentationml/2006/main" xmlns:r="http://schemas.openxmlformats.org/officeDocument/2006/relationships">
-  <p:cSld>
-    <p:spTree>
-      <p:nvGrpSpPr>
-        <p:cNvPr id="1" name=""/>
-        <p:cNvGrpSpPr/>
-        <p:nvPr/>
-      </p:nvGrpSpPr>
-      <p:grpSpPr/>
-      <p:sp>
-        <p:nvSpPr>
-          <p:cNvPr id="2" name="Text Placeholder 1"/>
-          <p:cNvSpPr>
-            <a:spLocks noGrp="1"/>
-          </p:cNvSpPr>
-          <p:nvPr>
-            <p:ph type="body" idx="100"/>
-          </p:nvPr>
-        </p:nvSpPr>
-        <p:spPr/>
-        <p:txBody>
-          <a:bodyPr/>
-          <a:lstStyle/>
-          <a:p>
-            <a:r>
-              <a:t>04</a:t>
-            </a:r>
-          </a:p>
-        </p:txBody>
-      </p:sp>
-      <p:sp>
-        <p:nvSpPr>
-          <p:cNvPr id="3" name="Title 2"/>
-          <p:cNvSpPr>
-            <a:spLocks noGrp="1"/>
-          </p:cNvSpPr>
-          <p:nvPr>
-            <p:ph type="title" idx="101"/>
-          </p:nvPr>
-        </p:nvSpPr>
-        <p:spPr/>
-        <p:txBody>
-          <a:bodyPr/>
-          <a:lstStyle/>
-          <a:p>
-            <a:r>
-              <a:t>교재 9.4–9.5 부스팅과 특징 중요도</a:t>
-            </a:r>
-          </a:p>
-        </p:txBody>
-      </p:sp>
-      <p:sp>
-        <p:nvSpPr>
-          <p:cNvPr id="4" name="Text Placeholder 3"/>
-          <p:cNvSpPr>
-            <a:spLocks noGrp="1"/>
-          </p:cNvSpPr>
-          <p:nvPr>
-            <p:ph type="body" idx="102"/>
-          </p:nvPr>
-        </p:nvSpPr>
-        <p:spPr/>
-        <p:txBody>
-          <a:bodyPr/>
-          <a:lstStyle/>
-          <a:p>
-            <a:pPr>
-              <a:spcAft>
-                <a:spcPts val="1000"/>
-              </a:spcAft>
-            </a:pPr>
-            <a:r>
-              <a:rPr>
-                <a:solidFill>
-                  <a:srgbClr val="AFAFAF"/>
-                </a:solidFill>
-              </a:rPr>
-              <a:t>4.1  </a:t>
-            </a:r>
-            <a:r>
-              <a:t>그래디언트 부스팅</a:t>
-            </a:r>
-          </a:p>
-          <a:p>
-            <a:pPr>
-              <a:spcAft>
-                <a:spcPts val="1000"/>
-              </a:spcAft>
-            </a:pPr>
-            <a:r>
-              <a:rPr>
-                <a:solidFill>
-                  <a:srgbClr val="AFAFAF"/>
-                </a:solidFill>
-              </a:rPr>
-              <a:t>4.2  </a:t>
-            </a:r>
-            <a:r>
-              <a:t>중요도 상위는 좌표</a:t>
-            </a:r>
-          </a:p>
-        </p:txBody>
-      </p:sp>
-    </p:spTree>
-  </p:cSld>
-  <p:clrMapOvr>
-    <a:masterClrMapping/>
-  </p:clrMapOvr>
-</p:sld>
-</file>
-
 <file path=ppt/slides/slide13.xml><?xml version="1.0" encoding="utf-8"?>
 <p:sld xmlns:a="http://schemas.openxmlformats.org/drawingml/2006/main" xmlns:p="http://schemas.openxmlformats.org/presentationml/2006/main" xmlns:r="http://schemas.openxmlformats.org/officeDocument/2006/relationships">
   <p:cSld>
@@ -5743,12 +5814,12 @@
       <p:grpSpPr/>
       <p:sp>
         <p:nvSpPr>
-          <p:cNvPr id="2" name="Title 1"/>
-          <p:cNvSpPr>
-            <a:spLocks noGrp="1"/>
-          </p:cNvSpPr>
-          <p:nvPr>
-            <p:ph type="title" idx="100"/>
+          <p:cNvPr id="2" name="Text Placeholder 1"/>
+          <p:cNvSpPr>
+            <a:spLocks noGrp="1"/>
+          </p:cNvSpPr>
+          <p:nvPr>
+            <p:ph type="body" idx="100"/>
           </p:nvPr>
         </p:nvSpPr>
         <p:spPr/>
@@ -5757,19 +5828,19 @@
           <a:lstStyle/>
           <a:p>
             <a:r>
-              <a:t>4.1 그래디언트 부스팅</a:t>
-            </a:r>
-          </a:p>
-        </p:txBody>
-      </p:sp>
-      <p:sp>
-        <p:nvSpPr>
-          <p:cNvPr id="3" name="Text Placeholder 2"/>
-          <p:cNvSpPr>
-            <a:spLocks noGrp="1"/>
-          </p:cNvSpPr>
-          <p:nvPr>
-            <p:ph type="body" idx="101"/>
+              <a:t>04</a:t>
+            </a:r>
+          </a:p>
+        </p:txBody>
+      </p:sp>
+      <p:sp>
+        <p:nvSpPr>
+          <p:cNvPr id="3" name="Title 2"/>
+          <p:cNvSpPr>
+            <a:spLocks noGrp="1"/>
+          </p:cNvSpPr>
+          <p:nvPr>
+            <p:ph type="title" idx="101"/>
           </p:nvPr>
         </p:nvSpPr>
         <p:spPr/>
@@ -5778,7 +5849,7 @@
           <a:lstStyle/>
           <a:p>
             <a:r>
-              <a:t>4. 교재 9.4–9.5 부스팅과 특징 중요도</a:t>
+              <a:t>교재 9.4–9.5 부스팅과 특징 중요도</a:t>
             </a:r>
           </a:p>
         </p:txBody>
@@ -5798,82 +5869,40 @@
           <a:bodyPr/>
           <a:lstStyle/>
           <a:p>
-            <a:pPr/>
-            <a:r>
-              <a:t>의사결정나무는 조건이 얽힌 규칙을 표현</a:t>
-            </a:r>
-          </a:p>
-          <a:p>
-            <a:pPr lvl="1"/>
-            <a:r>
-              <a:t>예시: 위도 37.55 초과이고 직선거리 4 km 초과면 12분</a:t>
-            </a:r>
-          </a:p>
-          <a:p>
-            <a:pPr/>
-            <a:r>
-              <a:t>나무 하나는 약하지만 앞 나무의 오차를 다음 나무가 보정</a:t>
-            </a:r>
-          </a:p>
-          <a:p>
-            <a:pPr/>
-            <a:r>
-              <a:t>결과: MAE 0.89분, R² 0.954</a:t>
-            </a:r>
-          </a:p>
-          <a:p>
-            <a:pPr/>
-            <a:r>
-              <a:t>선형회귀 2.16분 대비 절반 이하 — 평균 1분 이내 오차</a:t>
-            </a:r>
-          </a:p>
-        </p:txBody>
-      </p:sp>
-      <p:sp>
-        <p:nvSpPr>
-          <p:cNvPr id="25" name="Slide Number Placeholder 0"/>
-          <p:cNvSpPr>
-            <a:spLocks noGrp="1"/>
-          </p:cNvSpPr>
-          <p:nvPr>
-            <p:ph type="sldNum" sz="quarter" idx="4294967295"/>
-          </p:nvPr>
-        </p:nvSpPr>
-        <p:spPr>
-          <a:xfrm>
-            <a:off x="10591495" y="6355080"/>
-            <a:ext cx="914400" cy="274320"/>
-          </a:xfrm>
-          <a:prstGeom prst="rect">
-            <a:avLst/>
-          </a:prstGeom>
-          <a:extLst>
-            <a:ext uri="{C572A759-6A51-4108-AA02-DFA0A04FC94B}">
-              <ma14:wrappingTextBoxFlag xmlns:ma14="http://schemas.microsoft.com/office/mac/drawingml/2011/main" val="0"/>
-            </a:ext>
-          </a:extLst>
-        </p:spPr>
-        <p:txBody>
-          <a:bodyPr/>
-          <a:lstStyle>
-            <a:lvl1pPr>
-              <a:defRPr sz="1000">
+            <a:pPr>
+              <a:spcAft>
+                <a:spcPts val="1000"/>
+              </a:spcAft>
+            </a:pPr>
+            <a:r>
+              <a:rPr>
                 <a:solidFill>
                   <a:srgbClr val="AFAFAF"/>
                 </a:solidFill>
-                <a:latin typeface="Pretendard Medium"/>
-                <a:ea typeface="Pretendard Medium"/>
-                <a:cs typeface="Pretendard Medium"/>
-              </a:defRPr>
-            </a:lvl1pPr>
-          </a:lstStyle>
-          <a:p>
-            <a:pPr algn="r"/>
-            <a:fld id="{F7021451-1387-4CA6-816F-3879F97B5CBC}" type="slidenum">
-              <a:rPr b="0" lang="en-US"/>
-              <a:t>1004</a:t>
-            </a:fld>
-            <a:endParaRPr lang="en-US"/>
+              </a:rPr>
+              <a:t>4.1  </a:t>
+            </a:r>
+            <a:r>
+              <a:t>그래디언트 부스팅</a:t>
+            </a:r>
+          </a:p>
+          <a:p>
+            <a:pPr>
+              <a:spcAft>
+                <a:spcPts val="1000"/>
+              </a:spcAft>
+            </a:pPr>
+            <a:r>
+              <a:rPr>
+                <a:solidFill>
+                  <a:srgbClr val="AFAFAF"/>
+                </a:solidFill>
+              </a:rPr>
+              <a:t>4.2  </a:t>
+            </a:r>
+            <a:r>
+              <a:t>중요도 상위는 좌표</a:t>
+            </a:r>
           </a:p>
         </p:txBody>
       </p:sp>
@@ -5911,7 +5940,7 @@
           <a:lstStyle/>
           <a:p>
             <a:r>
-              <a:t>4.2 중요도 상위는 좌표</a:t>
+              <a:t>4.1 그래디언트 부스팅</a:t>
             </a:r>
           </a:p>
         </p:txBody>
@@ -5954,25 +5983,31 @@
           <a:p>
             <a:pPr/>
             <a:r>
-              <a:t>중요도 상위: 출발·도착 좌표 네 개 — 직선거리보다 높음</a:t>
+              <a:t>의사결정나무는 조건이 얽힌 규칙을 표현</a:t>
+            </a:r>
+          </a:p>
+          <a:p>
+            <a:pPr lvl="1"/>
+            <a:r>
+              <a:t>예시: 위도 37.55 초과이고 직선거리 4 km 초과면 12분</a:t>
             </a:r>
           </a:p>
           <a:p>
             <a:pPr/>
             <a:r>
-              <a:t>이유: 좌표 네 개로 거리도 계산되고 지역별 도로 사정까지 학습</a:t>
+              <a:t>나무 하나는 약하지만 앞 나무의 오차를 다음 나무가 보정</a:t>
             </a:r>
           </a:p>
           <a:p>
             <a:pPr/>
             <a:r>
-              <a:t>중요도 최하위는 시간대</a:t>
+              <a:t>결과: MAE 0.89분, R² 0.954</a:t>
             </a:r>
           </a:p>
           <a:p>
             <a:pPr/>
             <a:r>
-              <a:t>시간대별 평균 소요시간은 11.0분에서 12.7분 — 차이 1.7분</a:t>
+              <a:t>선형회귀 2.16분 대비 절반 이하 — 평균 1분 이내 오차</a:t>
             </a:r>
           </a:p>
         </p:txBody>
@@ -6045,12 +6080,12 @@
       <p:grpSpPr/>
       <p:sp>
         <p:nvSpPr>
-          <p:cNvPr id="2" name="Text Placeholder 1"/>
-          <p:cNvSpPr>
-            <a:spLocks noGrp="1"/>
-          </p:cNvSpPr>
-          <p:nvPr>
-            <p:ph type="body" idx="100"/>
+          <p:cNvPr id="2" name="Title 1"/>
+          <p:cNvSpPr>
+            <a:spLocks noGrp="1"/>
+          </p:cNvSpPr>
+          <p:nvPr>
+            <p:ph type="title" idx="100"/>
           </p:nvPr>
         </p:nvSpPr>
         <p:spPr/>
@@ -6059,19 +6094,19 @@
           <a:lstStyle/>
           <a:p>
             <a:r>
-              <a:t>05</a:t>
-            </a:r>
-          </a:p>
-        </p:txBody>
-      </p:sp>
-      <p:sp>
-        <p:nvSpPr>
-          <p:cNvPr id="3" name="Title 2"/>
-          <p:cNvSpPr>
-            <a:spLocks noGrp="1"/>
-          </p:cNvSpPr>
-          <p:nvPr>
-            <p:ph type="title" idx="101"/>
+              <a:t>4.2 중요도 상위는 좌표</a:t>
+            </a:r>
+          </a:p>
+        </p:txBody>
+      </p:sp>
+      <p:sp>
+        <p:nvSpPr>
+          <p:cNvPr id="3" name="Text Placeholder 2"/>
+          <p:cNvSpPr>
+            <a:spLocks noGrp="1"/>
+          </p:cNvSpPr>
+          <p:nvPr>
+            <p:ph type="body" idx="101"/>
           </p:nvPr>
         </p:nvSpPr>
         <p:spPr/>
@@ -6080,7 +6115,7 @@
           <a:lstStyle/>
           <a:p>
             <a:r>
-              <a:t>교재 9.6 속도와 정확도의 거래</a:t>
+              <a:t>4. 교재 9.4–9.5 부스팅과 특징 중요도</a:t>
             </a:r>
           </a:p>
         </p:txBody>
@@ -6100,22 +6135,76 @@
           <a:bodyPr/>
           <a:lstStyle/>
           <a:p>
-            <a:pPr>
-              <a:spcAft>
-                <a:spcPts val="1000"/>
-              </a:spcAft>
-            </a:pPr>
-            <a:r>
-              <a:rPr>
+            <a:pPr/>
+            <a:r>
+              <a:t>중요도 상위: 출발·도착 좌표 네 개 — 직선거리보다 높음</a:t>
+            </a:r>
+          </a:p>
+          <a:p>
+            <a:pPr/>
+            <a:r>
+              <a:t>이유: 좌표 네 개로 거리도 계산되고 지역별 도로 사정까지 학습</a:t>
+            </a:r>
+          </a:p>
+          <a:p>
+            <a:pPr/>
+            <a:r>
+              <a:t>중요도 최하위는 시간대</a:t>
+            </a:r>
+          </a:p>
+          <a:p>
+            <a:pPr/>
+            <a:r>
+              <a:t>시간대별 평균 소요시간은 11.0분에서 12.7분 — 차이 1.7분</a:t>
+            </a:r>
+          </a:p>
+        </p:txBody>
+      </p:sp>
+      <p:sp>
+        <p:nvSpPr>
+          <p:cNvPr id="25" name="Slide Number Placeholder 0"/>
+          <p:cNvSpPr>
+            <a:spLocks noGrp="1"/>
+          </p:cNvSpPr>
+          <p:nvPr>
+            <p:ph type="sldNum" sz="quarter" idx="4294967295"/>
+          </p:nvPr>
+        </p:nvSpPr>
+        <p:spPr>
+          <a:xfrm>
+            <a:off x="10591495" y="6355080"/>
+            <a:ext cx="914400" cy="274320"/>
+          </a:xfrm>
+          <a:prstGeom prst="rect">
+            <a:avLst/>
+          </a:prstGeom>
+          <a:extLst>
+            <a:ext uri="{C572A759-6A51-4108-AA02-DFA0A04FC94B}">
+              <ma14:wrappingTextBoxFlag xmlns:ma14="http://schemas.microsoft.com/office/mac/drawingml/2011/main" val="0"/>
+            </a:ext>
+          </a:extLst>
+        </p:spPr>
+        <p:txBody>
+          <a:bodyPr/>
+          <a:lstStyle>
+            <a:lvl1pPr>
+              <a:defRPr sz="1000">
                 <a:solidFill>
                   <a:srgbClr val="AFAFAF"/>
                 </a:solidFill>
-              </a:rPr>
-              <a:t>5.1  </a:t>
-            </a:r>
-            <a:r>
-              <a:t>3천 배 빠르고 1분 틀림</a:t>
-            </a:r>
+                <a:latin typeface="Pretendard Medium"/>
+                <a:ea typeface="Pretendard Medium"/>
+                <a:cs typeface="Pretendard Medium"/>
+              </a:defRPr>
+            </a:lvl1pPr>
+          </a:lstStyle>
+          <a:p>
+            <a:pPr algn="r"/>
+            <a:fld id="{F7021451-1387-4CA6-816F-3879F97B5CBC}" type="slidenum">
+              <a:rPr b="0" lang="en-US"/>
+              <a:t>1004</a:t>
+            </a:fld>
+            <a:endParaRPr lang="en-US"/>
           </a:p>
         </p:txBody>
       </p:sp>
@@ -6139,6 +6228,100 @@
       <p:grpSpPr/>
       <p:sp>
         <p:nvSpPr>
+          <p:cNvPr id="2" name="Text Placeholder 1"/>
+          <p:cNvSpPr>
+            <a:spLocks noGrp="1"/>
+          </p:cNvSpPr>
+          <p:nvPr>
+            <p:ph type="body" idx="100"/>
+          </p:nvPr>
+        </p:nvSpPr>
+        <p:spPr/>
+        <p:txBody>
+          <a:bodyPr/>
+          <a:lstStyle/>
+          <a:p>
+            <a:r>
+              <a:t>05</a:t>
+            </a:r>
+          </a:p>
+        </p:txBody>
+      </p:sp>
+      <p:sp>
+        <p:nvSpPr>
+          <p:cNvPr id="3" name="Title 2"/>
+          <p:cNvSpPr>
+            <a:spLocks noGrp="1"/>
+          </p:cNvSpPr>
+          <p:nvPr>
+            <p:ph type="title" idx="101"/>
+          </p:nvPr>
+        </p:nvSpPr>
+        <p:spPr/>
+        <p:txBody>
+          <a:bodyPr/>
+          <a:lstStyle/>
+          <a:p>
+            <a:r>
+              <a:t>교재 9.6 속도와 정확도의 거래</a:t>
+            </a:r>
+          </a:p>
+        </p:txBody>
+      </p:sp>
+      <p:sp>
+        <p:nvSpPr>
+          <p:cNvPr id="4" name="Text Placeholder 3"/>
+          <p:cNvSpPr>
+            <a:spLocks noGrp="1"/>
+          </p:cNvSpPr>
+          <p:nvPr>
+            <p:ph type="body" idx="102"/>
+          </p:nvPr>
+        </p:nvSpPr>
+        <p:spPr/>
+        <p:txBody>
+          <a:bodyPr/>
+          <a:lstStyle/>
+          <a:p>
+            <a:pPr>
+              <a:spcAft>
+                <a:spcPts val="1000"/>
+              </a:spcAft>
+            </a:pPr>
+            <a:r>
+              <a:rPr>
+                <a:solidFill>
+                  <a:srgbClr val="AFAFAF"/>
+                </a:solidFill>
+              </a:rPr>
+              <a:t>5.1  </a:t>
+            </a:r>
+            <a:r>
+              <a:t>3천 배 빠르고 1분 틀림</a:t>
+            </a:r>
+          </a:p>
+        </p:txBody>
+      </p:sp>
+    </p:spTree>
+  </p:cSld>
+  <p:clrMapOvr>
+    <a:masterClrMapping/>
+  </p:clrMapOvr>
+</p:sld>
+</file>
+
+<file path=ppt/slides/slide17.xml><?xml version="1.0" encoding="utf-8"?>
+<p:sld xmlns:a="http://schemas.openxmlformats.org/drawingml/2006/main" xmlns:p="http://schemas.openxmlformats.org/presentationml/2006/main" xmlns:r="http://schemas.openxmlformats.org/officeDocument/2006/relationships">
+  <p:cSld>
+    <p:spTree>
+      <p:nvGrpSpPr>
+        <p:cNvPr id="1" name=""/>
+        <p:cNvGrpSpPr/>
+        <p:nvPr/>
+      </p:nvGrpSpPr>
+      <p:grpSpPr/>
+      <p:sp>
+        <p:nvSpPr>
           <p:cNvPr id="2" name="Title 1"/>
           <p:cNvSpPr>
             <a:spLocks noGrp="1"/>
@@ -6229,7 +6412,7 @@
           <a:lstStyle/>
           <a:p>
             <a:r>
-              <a:t>표 3. 용도별 예측 모델 적용 가능 여부</a:t>
+              <a:t>표 4. 용도별 예측 모델 적용 가능 여부</a:t>
             </a:r>
           </a:p>
         </p:txBody>
@@ -6751,7 +6934,7 @@
 </p:sld>
 </file>
 
-<file path=ppt/slides/slide17.xml><?xml version="1.0" encoding="utf-8"?>
+<file path=ppt/slides/slide18.xml><?xml version="1.0" encoding="utf-8"?>
 <p:sld xmlns:a="http://schemas.openxmlformats.org/drawingml/2006/main" xmlns:p="http://schemas.openxmlformats.org/presentationml/2006/main" xmlns:r="http://schemas.openxmlformats.org/officeDocument/2006/relationships">
   <p:cSld>
     <p:spTree>
@@ -6881,7 +7064,7 @@
 </p:sld>
 </file>
 
-<file path=ppt/slides/slide18.xml><?xml version="1.0" encoding="utf-8"?>
+<file path=ppt/slides/slide19.xml><?xml version="1.0" encoding="utf-8"?>
 <p:sld xmlns:a="http://schemas.openxmlformats.org/drawingml/2006/main" xmlns:p="http://schemas.openxmlformats.org/presentationml/2006/main" xmlns:r="http://schemas.openxmlformats.org/officeDocument/2006/relationships">
   <p:cSld>
     <p:spTree>
@@ -7060,154 +7243,6 @@
           </a:prstGeom>
         </p:spPr>
       </p:pic>
-    </p:spTree>
-  </p:cSld>
-  <p:clrMapOvr>
-    <a:masterClrMapping/>
-  </p:clrMapOvr>
-</p:sld>
-</file>
-
-<file path=ppt/slides/slide19.xml><?xml version="1.0" encoding="utf-8"?>
-<p:sld xmlns:a="http://schemas.openxmlformats.org/drawingml/2006/main" xmlns:p="http://schemas.openxmlformats.org/presentationml/2006/main" xmlns:r="http://schemas.openxmlformats.org/officeDocument/2006/relationships">
-  <p:cSld>
-    <p:spTree>
-      <p:nvGrpSpPr>
-        <p:cNvPr id="1" name=""/>
-        <p:cNvGrpSpPr/>
-        <p:nvPr/>
-      </p:nvGrpSpPr>
-      <p:grpSpPr/>
-      <p:sp>
-        <p:nvSpPr>
-          <p:cNvPr id="2" name="Title 1"/>
-          <p:cNvSpPr>
-            <a:spLocks noGrp="1"/>
-          </p:cNvSpPr>
-          <p:nvPr>
-            <p:ph type="title" idx="100"/>
-          </p:nvPr>
-        </p:nvSpPr>
-        <p:spPr/>
-        <p:txBody>
-          <a:bodyPr/>
-          <a:lstStyle/>
-          <a:p>
-            <a:r>
-              <a:t>6.2 오늘의 정리</a:t>
-            </a:r>
-          </a:p>
-        </p:txBody>
-      </p:sp>
-      <p:sp>
-        <p:nvSpPr>
-          <p:cNvPr id="3" name="Text Placeholder 2"/>
-          <p:cNvSpPr>
-            <a:spLocks noGrp="1"/>
-          </p:cNvSpPr>
-          <p:nvPr>
-            <p:ph type="body" idx="101"/>
-          </p:nvPr>
-        </p:nvSpPr>
-        <p:spPr/>
-        <p:txBody>
-          <a:bodyPr/>
-          <a:lstStyle/>
-          <a:p>
-            <a:r>
-              <a:t>6. 교재 9.7 오차 분석과 정리</a:t>
-            </a:r>
-          </a:p>
-        </p:txBody>
-      </p:sp>
-      <p:sp>
-        <p:nvSpPr>
-          <p:cNvPr id="4" name="Text Placeholder 3"/>
-          <p:cNvSpPr>
-            <a:spLocks noGrp="1"/>
-          </p:cNvSpPr>
-          <p:nvPr>
-            <p:ph type="body" idx="102"/>
-          </p:nvPr>
-        </p:nvSpPr>
-        <p:spPr/>
-        <p:txBody>
-          <a:bodyPr/>
-          <a:lstStyle/>
-          <a:p>
-            <a:pPr/>
-            <a:r>
-              <a:t>배차에 필요한 것은 정확한 경로가 아니라 순위 — 예측으로 대체 가능</a:t>
-            </a:r>
-          </a:p>
-          <a:p>
-            <a:pPr/>
-            <a:r>
-              <a:t>특징은 예측 시점에 얻을 수 있는 것만 사용</a:t>
-            </a:r>
-          </a:p>
-          <a:p>
-            <a:pPr/>
-            <a:r>
-              <a:t>기준선 2.52분, 선형회귀 2.16분, 부스팅 0.89분</a:t>
-            </a:r>
-          </a:p>
-          <a:p>
-            <a:pPr/>
-            <a:r>
-              <a:t>다익스트라보다 3천 배 빠르고 평균 1분 오차</a:t>
-            </a:r>
-          </a:p>
-        </p:txBody>
-      </p:sp>
-      <p:sp>
-        <p:nvSpPr>
-          <p:cNvPr id="25" name="Slide Number Placeholder 0"/>
-          <p:cNvSpPr>
-            <a:spLocks noGrp="1"/>
-          </p:cNvSpPr>
-          <p:nvPr>
-            <p:ph type="sldNum" sz="quarter" idx="4294967295"/>
-          </p:nvPr>
-        </p:nvSpPr>
-        <p:spPr>
-          <a:xfrm>
-            <a:off x="10591495" y="6355080"/>
-            <a:ext cx="914400" cy="274320"/>
-          </a:xfrm>
-          <a:prstGeom prst="rect">
-            <a:avLst/>
-          </a:prstGeom>
-          <a:extLst>
-            <a:ext uri="{C572A759-6A51-4108-AA02-DFA0A04FC94B}">
-              <ma14:wrappingTextBoxFlag xmlns:ma14="http://schemas.microsoft.com/office/mac/drawingml/2011/main" val="0"/>
-            </a:ext>
-          </a:extLst>
-        </p:spPr>
-        <p:txBody>
-          <a:bodyPr/>
-          <a:lstStyle>
-            <a:lvl1pPr>
-              <a:defRPr sz="1000">
-                <a:solidFill>
-                  <a:srgbClr val="AFAFAF"/>
-                </a:solidFill>
-                <a:latin typeface="Pretendard Medium"/>
-                <a:ea typeface="Pretendard Medium"/>
-                <a:cs typeface="Pretendard Medium"/>
-              </a:defRPr>
-            </a:lvl1pPr>
-          </a:lstStyle>
-          <a:p>
-            <a:pPr algn="r"/>
-            <a:fld id="{F7021451-1387-4CA6-816F-3879F97B5CBC}" type="slidenum">
-              <a:rPr b="0" lang="en-US"/>
-              <a:t>1004</a:t>
-            </a:fld>
-            <a:endParaRPr lang="en-US"/>
-          </a:p>
-        </p:txBody>
-      </p:sp>
     </p:spTree>
   </p:cSld>
   <p:clrMapOvr>
@@ -7376,7 +7411,7 @@
                           </a:solidFill>
                           <a:latin typeface="Pretendard Medium"/>
                         </a:rPr>
-                        <a:t>1.1 계산하는 대신 예측하기  ·  1.2 학습 목표</a:t>
+                        <a:t>1.1 계산하는 대신 예측하기  ·  1.2 학습 목표  ·  1.3 교재와 실습을 여는 곳</a:t>
                       </a:r>
                     </a:p>
                   </a:txBody>
@@ -8037,7 +8072,7 @@
           <a:lstStyle/>
           <a:p>
             <a:r>
-              <a:t>6.3 연습과 다음 장</a:t>
+              <a:t>6.2 오늘의 정리</a:t>
             </a:r>
           </a:p>
         </p:txBody>
@@ -8080,37 +8115,25 @@
           <a:p>
             <a:pPr/>
             <a:r>
-              <a:t>연습 9.1 ★ — 나무 개수를 50에서 800까지 변경했을 때의 성능과 학습 시간</a:t>
-            </a:r>
-          </a:p>
-          <a:p>
-            <a:pPr lvl="1"/>
-            <a:r>
-              <a:t>산출물: 개수별 MAE와 학습시간 표, 적정 값과 근거 2줄</a:t>
+              <a:t>배차에 필요한 것은 정확한 경로가 아니라 순위 — 예측으로 대체 가능</a:t>
             </a:r>
           </a:p>
           <a:p>
             <a:pPr/>
             <a:r>
-              <a:t>연습 9.2 ★★ — 특징을 하나씩 제거하는 실험</a:t>
-            </a:r>
-          </a:p>
-          <a:p>
-            <a:pPr lvl="1"/>
-            <a:r>
-              <a:t>산출물: 특징별 MAE 증가량 표, 중요도 순서와의 비교 3~4줄</a:t>
+              <a:t>특징은 예측 시점에 얻을 수 있는 것만 사용</a:t>
             </a:r>
           </a:p>
           <a:p>
             <a:pPr/>
             <a:r>
-              <a:t>연습 9.3 ★★★ — 우회 여부를 대신하는 특징 설계</a:t>
+              <a:t>기준선 2.52분, 선형회귀 2.16분, 부스팅 0.89분</a:t>
             </a:r>
           </a:p>
           <a:p>
             <a:pPr/>
             <a:r>
-              <a:t>다음 장: 10장 배차와 물류 최적화</a:t>
+              <a:t>다익스트라보다 3천 배 빠르고 평균 1분 오차</a:t>
             </a:r>
           </a:p>
         </p:txBody>
@@ -8197,6 +8220,166 @@
           <a:lstStyle/>
           <a:p>
             <a:r>
+              <a:t>6.3 연습과 다음 장</a:t>
+            </a:r>
+          </a:p>
+        </p:txBody>
+      </p:sp>
+      <p:sp>
+        <p:nvSpPr>
+          <p:cNvPr id="3" name="Text Placeholder 2"/>
+          <p:cNvSpPr>
+            <a:spLocks noGrp="1"/>
+          </p:cNvSpPr>
+          <p:nvPr>
+            <p:ph type="body" idx="101"/>
+          </p:nvPr>
+        </p:nvSpPr>
+        <p:spPr/>
+        <p:txBody>
+          <a:bodyPr/>
+          <a:lstStyle/>
+          <a:p>
+            <a:r>
+              <a:t>6. 교재 9.7 오차 분석과 정리</a:t>
+            </a:r>
+          </a:p>
+        </p:txBody>
+      </p:sp>
+      <p:sp>
+        <p:nvSpPr>
+          <p:cNvPr id="4" name="Text Placeholder 3"/>
+          <p:cNvSpPr>
+            <a:spLocks noGrp="1"/>
+          </p:cNvSpPr>
+          <p:nvPr>
+            <p:ph type="body" idx="102"/>
+          </p:nvPr>
+        </p:nvSpPr>
+        <p:spPr/>
+        <p:txBody>
+          <a:bodyPr/>
+          <a:lstStyle/>
+          <a:p>
+            <a:pPr/>
+            <a:r>
+              <a:t>연습 9.1 ★ — 나무 개수를 50에서 800까지 변경했을 때의 성능과 학습 시간</a:t>
+            </a:r>
+          </a:p>
+          <a:p>
+            <a:pPr lvl="1"/>
+            <a:r>
+              <a:t>산출물: 개수별 MAE와 학습시간 표, 적정 값과 근거 2줄</a:t>
+            </a:r>
+          </a:p>
+          <a:p>
+            <a:pPr/>
+            <a:r>
+              <a:t>연습 9.2 ★★ — 특징을 하나씩 제거하는 실험</a:t>
+            </a:r>
+          </a:p>
+          <a:p>
+            <a:pPr lvl="1"/>
+            <a:r>
+              <a:t>산출물: 특징별 MAE 증가량 표, 중요도 순서와의 비교 3~4줄</a:t>
+            </a:r>
+          </a:p>
+          <a:p>
+            <a:pPr/>
+            <a:r>
+              <a:t>연습 9.3 ★★★ — 우회 여부를 대신하는 특징 설계</a:t>
+            </a:r>
+          </a:p>
+          <a:p>
+            <a:pPr/>
+            <a:r>
+              <a:t>다음 장: 10장 배차와 물류 최적화</a:t>
+            </a:r>
+          </a:p>
+        </p:txBody>
+      </p:sp>
+      <p:sp>
+        <p:nvSpPr>
+          <p:cNvPr id="25" name="Slide Number Placeholder 0"/>
+          <p:cNvSpPr>
+            <a:spLocks noGrp="1"/>
+          </p:cNvSpPr>
+          <p:nvPr>
+            <p:ph type="sldNum" sz="quarter" idx="4294967295"/>
+          </p:nvPr>
+        </p:nvSpPr>
+        <p:spPr>
+          <a:xfrm>
+            <a:off x="10591495" y="6355080"/>
+            <a:ext cx="914400" cy="274320"/>
+          </a:xfrm>
+          <a:prstGeom prst="rect">
+            <a:avLst/>
+          </a:prstGeom>
+          <a:extLst>
+            <a:ext uri="{C572A759-6A51-4108-AA02-DFA0A04FC94B}">
+              <ma14:wrappingTextBoxFlag xmlns:ma14="http://schemas.microsoft.com/office/mac/drawingml/2011/main" val="0"/>
+            </a:ext>
+          </a:extLst>
+        </p:spPr>
+        <p:txBody>
+          <a:bodyPr/>
+          <a:lstStyle>
+            <a:lvl1pPr>
+              <a:defRPr sz="1000">
+                <a:solidFill>
+                  <a:srgbClr val="AFAFAF"/>
+                </a:solidFill>
+                <a:latin typeface="Pretendard Medium"/>
+                <a:ea typeface="Pretendard Medium"/>
+                <a:cs typeface="Pretendard Medium"/>
+              </a:defRPr>
+            </a:lvl1pPr>
+          </a:lstStyle>
+          <a:p>
+            <a:pPr algn="r"/>
+            <a:fld id="{F7021451-1387-4CA6-816F-3879F97B5CBC}" type="slidenum">
+              <a:rPr b="0" lang="en-US"/>
+              <a:t>1004</a:t>
+            </a:fld>
+            <a:endParaRPr lang="en-US"/>
+          </a:p>
+        </p:txBody>
+      </p:sp>
+    </p:spTree>
+  </p:cSld>
+  <p:clrMapOvr>
+    <a:masterClrMapping/>
+  </p:clrMapOvr>
+</p:sld>
+</file>
+
+<file path=ppt/slides/slide22.xml><?xml version="1.0" encoding="utf-8"?>
+<p:sld xmlns:a="http://schemas.openxmlformats.org/drawingml/2006/main" xmlns:p="http://schemas.openxmlformats.org/presentationml/2006/main" xmlns:r="http://schemas.openxmlformats.org/officeDocument/2006/relationships">
+  <p:cSld>
+    <p:spTree>
+      <p:nvGrpSpPr>
+        <p:cNvPr id="1" name=""/>
+        <p:cNvGrpSpPr/>
+        <p:nvPr/>
+      </p:nvGrpSpPr>
+      <p:grpSpPr/>
+      <p:sp>
+        <p:nvSpPr>
+          <p:cNvPr id="2" name="Title 1"/>
+          <p:cNvSpPr>
+            <a:spLocks noGrp="1"/>
+          </p:cNvSpPr>
+          <p:nvPr>
+            <p:ph type="title" idx="100"/>
+          </p:nvPr>
+        </p:nvSpPr>
+        <p:spPr/>
+        <p:txBody>
+          <a:bodyPr/>
+          <a:lstStyle/>
+          <a:p>
+            <a:r>
               <a:t>수요일에 봅니다</a:t>
             </a:r>
           </a:p>
@@ -8354,6 +8537,24 @@
               <a:t>학습 목표</a:t>
             </a:r>
           </a:p>
+          <a:p>
+            <a:pPr>
+              <a:spcAft>
+                <a:spcPts val="1000"/>
+              </a:spcAft>
+            </a:pPr>
+            <a:r>
+              <a:rPr>
+                <a:solidFill>
+                  <a:srgbClr val="AFAFAF"/>
+                </a:solidFill>
+              </a:rPr>
+              <a:t>1.3  </a:t>
+            </a:r>
+            <a:r>
+              <a:t>교재와 실습을 여는 곳</a:t>
+            </a:r>
+          </a:p>
         </p:txBody>
       </p:sp>
     </p:spTree>
@@ -8672,12 +8873,12 @@
       <p:grpSpPr/>
       <p:sp>
         <p:nvSpPr>
-          <p:cNvPr id="2" name="Text Placeholder 1"/>
-          <p:cNvSpPr>
-            <a:spLocks noGrp="1"/>
-          </p:cNvSpPr>
-          <p:nvPr>
-            <p:ph type="body" idx="100"/>
+          <p:cNvPr id="2" name="Title 1"/>
+          <p:cNvSpPr>
+            <a:spLocks noGrp="1"/>
+          </p:cNvSpPr>
+          <p:nvPr>
+            <p:ph type="title" idx="100"/>
           </p:nvPr>
         </p:nvSpPr>
         <p:spPr/>
@@ -8686,19 +8887,19 @@
           <a:lstStyle/>
           <a:p>
             <a:r>
-              <a:t>02</a:t>
-            </a:r>
-          </a:p>
-        </p:txBody>
-      </p:sp>
-      <p:sp>
-        <p:nvSpPr>
-          <p:cNvPr id="3" name="Title 2"/>
-          <p:cNvSpPr>
-            <a:spLocks noGrp="1"/>
-          </p:cNvSpPr>
-          <p:nvPr>
-            <p:ph type="title" idx="101"/>
+              <a:t>1.3 교재와 실습을 여는 곳</a:t>
+            </a:r>
+          </a:p>
+        </p:txBody>
+      </p:sp>
+      <p:sp>
+        <p:nvSpPr>
+          <p:cNvPr id="3" name="Text Placeholder 2"/>
+          <p:cNvSpPr>
+            <a:spLocks noGrp="1"/>
+          </p:cNvSpPr>
+          <p:nvPr>
+            <p:ph type="body" idx="101"/>
           </p:nvPr>
         </p:nvSpPr>
         <p:spPr/>
@@ -8707,7 +8908,7 @@
           <a:lstStyle/>
           <a:p>
             <a:r>
-              <a:t>교재 9.1 학습 데이터와 특징</a:t>
+              <a:t>1. 도입과 학습 목표</a:t>
             </a:r>
           </a:p>
         </p:txBody>
@@ -8727,40 +8928,335 @@
           <a:bodyPr/>
           <a:lstStyle/>
           <a:p>
-            <a:pPr>
-              <a:spcAft>
-                <a:spcPts val="1000"/>
-              </a:spcAft>
-            </a:pPr>
-            <a:r>
-              <a:rPr>
+            <a:pPr/>
+            <a:r>
+              <a:t>저장소: github.com/jihoyeo/mobility-simulation-book — blob/main 아래 경로</a:t>
+            </a:r>
+          </a:p>
+          <a:p>
+            <a:pPr/>
+            <a:r>
+              <a:t>노트북 실행: jupyter lab labs/ch09_eta.ipynb</a:t>
+            </a:r>
+          </a:p>
+          <a:p>
+            <a:pPr/>
+            <a:r>
+              <a:t>진행 순서: 슬라이드 개요 → 교재 본문 → 실습 노트북</a:t>
+            </a:r>
+          </a:p>
+        </p:txBody>
+      </p:sp>
+      <p:sp>
+        <p:nvSpPr>
+          <p:cNvPr id="5" name="Text Placeholder 4"/>
+          <p:cNvSpPr>
+            <a:spLocks noGrp="1"/>
+          </p:cNvSpPr>
+          <p:nvPr>
+            <p:ph type="body" idx="103"/>
+          </p:nvPr>
+        </p:nvSpPr>
+        <p:spPr/>
+        <p:txBody>
+          <a:bodyPr/>
+          <a:lstStyle/>
+          <a:p>
+            <a:r>
+              <a:t>표 1. 오늘 여는 파일과 경로</a:t>
+            </a:r>
+          </a:p>
+        </p:txBody>
+      </p:sp>
+      <p:graphicFrame>
+        <p:nvGraphicFramePr>
+          <p:cNvPr id="6" name="Table Placeholder 5"/>
+          <p:cNvGraphicFramePr>
+            <a:graphicFrameLocks noGrp="1"/>
+          </p:cNvGraphicFramePr>
+          <p:nvPr>
+            <p:ph type="tbl" idx="104"/>
+          </p:nvPr>
+        </p:nvGraphicFramePr>
+        <p:xfrm>
+          <a:off x="4937760" y="1828800"/>
+          <a:ext cx="6565392" cy="1676400"/>
+        </p:xfrm>
+        <a:graphic>
+          <a:graphicData uri="http://schemas.openxmlformats.org/drawingml/2006/table">
+            <a:tbl>
+              <a:tblPr firstRow="0" bandRow="0" firstCol="0" lastRow="0" lastCol="0" bandCol="0"/>
+              <a:tblGrid>
+                <a:gridCol w="3282696"/>
+                <a:gridCol w="3282696"/>
+              </a:tblGrid>
+              <a:tr h="406400">
+                <a:tc>
+                  <a:txBody>
+                    <a:bodyPr/>
+                    <a:lstStyle/>
+                    <a:p>
+                      <a:r>
+                        <a:rPr sz="1300" b="0">
+                          <a:solidFill>
+                            <a:srgbClr val="FFFFFF"/>
+                          </a:solidFill>
+                          <a:latin typeface="Pretendard Medium"/>
+                        </a:rPr>
+                        <a:t>자료</a:t>
+                      </a:r>
+                    </a:p>
+                  </a:txBody>
+                  <a:tcPr marL="101600" marR="101600" marT="76200" marB="76200" anchor="ctr">
+                    <a:solidFill>
+                      <a:srgbClr val="000000"/>
+                    </a:solidFill>
+                    <a:lnL w="0">
+                      <a:noFill/>
+                    </a:lnL>
+                    <a:lnR w="0">
+                      <a:noFill/>
+                    </a:lnR>
+                    <a:lnT w="0">
+                      <a:noFill/>
+                    </a:lnT>
+                    <a:lnB w="0">
+                      <a:noFill/>
+                    </a:lnB>
+                  </a:tcPr>
+                </a:tc>
+                <a:tc>
+                  <a:txBody>
+                    <a:bodyPr/>
+                    <a:lstStyle/>
+                    <a:p>
+                      <a:r>
+                        <a:rPr sz="1300" b="0">
+                          <a:solidFill>
+                            <a:srgbClr val="FFFFFF"/>
+                          </a:solidFill>
+                          <a:latin typeface="Pretendard Medium"/>
+                        </a:rPr>
+                        <a:t>경로</a:t>
+                      </a:r>
+                    </a:p>
+                  </a:txBody>
+                  <a:tcPr marL="101600" marR="101600" marT="76200" marB="76200" anchor="ctr">
+                    <a:solidFill>
+                      <a:srgbClr val="000000"/>
+                    </a:solidFill>
+                    <a:lnL w="0">
+                      <a:noFill/>
+                    </a:lnL>
+                    <a:lnR w="0">
+                      <a:noFill/>
+                    </a:lnR>
+                    <a:lnT w="0">
+                      <a:noFill/>
+                    </a:lnT>
+                    <a:lnB w="0">
+                      <a:noFill/>
+                    </a:lnB>
+                  </a:tcPr>
+                </a:tc>
+              </a:tr>
+              <a:tr h="635000">
+                <a:tc>
+                  <a:txBody>
+                    <a:bodyPr/>
+                    <a:lstStyle/>
+                    <a:p>
+                      <a:r>
+                        <a:rPr sz="1300" b="1">
+                          <a:solidFill>
+                            <a:srgbClr val="000000"/>
+                          </a:solidFill>
+                          <a:latin typeface="Pretendard"/>
+                        </a:rPr>
+                        <a:t>교재 원고</a:t>
+                      </a:r>
+                    </a:p>
+                  </a:txBody>
+                  <a:tcPr marL="101600" marR="101600" marT="101600" marB="101600" anchor="ctr">
+                    <a:solidFill>
+                      <a:srgbClr val="FFFFFF"/>
+                    </a:solidFill>
+                    <a:lnL w="0">
+                      <a:noFill/>
+                    </a:lnL>
+                    <a:lnR w="0">
+                      <a:noFill/>
+                    </a:lnR>
+                    <a:lnT w="0">
+                      <a:noFill/>
+                    </a:lnT>
+                    <a:lnB w="9525">
+                      <a:solidFill>
+                        <a:srgbClr val="E2E2E2"/>
+                      </a:solidFill>
+                    </a:lnB>
+                  </a:tcPr>
+                </a:tc>
+                <a:tc>
+                  <a:txBody>
+                    <a:bodyPr/>
+                    <a:lstStyle/>
+                    <a:p>
+                      <a:r>
+                        <a:rPr sz="1300" b="0">
+                          <a:solidFill>
+                            <a:srgbClr val="5E5E5E"/>
+                          </a:solidFill>
+                          <a:latin typeface="Pretendard Medium"/>
+                        </a:rPr>
+                        <a:t>ko/ch09_eta.md</a:t>
+                      </a:r>
+                    </a:p>
+                  </a:txBody>
+                  <a:tcPr marL="101600" marR="101600" marT="101600" marB="101600" anchor="ctr">
+                    <a:solidFill>
+                      <a:srgbClr val="FFFFFF"/>
+                    </a:solidFill>
+                    <a:lnL w="0">
+                      <a:noFill/>
+                    </a:lnL>
+                    <a:lnR w="0">
+                      <a:noFill/>
+                    </a:lnR>
+                    <a:lnT w="0">
+                      <a:noFill/>
+                    </a:lnT>
+                    <a:lnB w="9525">
+                      <a:solidFill>
+                        <a:srgbClr val="E2E2E2"/>
+                      </a:solidFill>
+                    </a:lnB>
+                  </a:tcPr>
+                </a:tc>
+              </a:tr>
+              <a:tr h="635000">
+                <a:tc>
+                  <a:txBody>
+                    <a:bodyPr/>
+                    <a:lstStyle/>
+                    <a:p>
+                      <a:r>
+                        <a:rPr sz="1300" b="1">
+                          <a:solidFill>
+                            <a:srgbClr val="000000"/>
+                          </a:solidFill>
+                          <a:latin typeface="Pretendard"/>
+                        </a:rPr>
+                        <a:t>실습 노트북</a:t>
+                      </a:r>
+                    </a:p>
+                  </a:txBody>
+                  <a:tcPr marL="101600" marR="101600" marT="101600" marB="101600" anchor="ctr">
+                    <a:solidFill>
+                      <a:srgbClr val="FFFFFF"/>
+                    </a:solidFill>
+                    <a:lnL w="0">
+                      <a:noFill/>
+                    </a:lnL>
+                    <a:lnR w="0">
+                      <a:noFill/>
+                    </a:lnR>
+                    <a:lnT w="0">
+                      <a:noFill/>
+                    </a:lnT>
+                    <a:lnB w="9525">
+                      <a:solidFill>
+                        <a:srgbClr val="E2E2E2"/>
+                      </a:solidFill>
+                    </a:lnB>
+                  </a:tcPr>
+                </a:tc>
+                <a:tc>
+                  <a:txBody>
+                    <a:bodyPr/>
+                    <a:lstStyle/>
+                    <a:p>
+                      <a:r>
+                        <a:rPr sz="1300" b="0">
+                          <a:solidFill>
+                            <a:srgbClr val="5E5E5E"/>
+                          </a:solidFill>
+                          <a:latin typeface="Pretendard Medium"/>
+                        </a:rPr>
+                        <a:t>labs/ch09_eta.ipynb</a:t>
+                      </a:r>
+                    </a:p>
+                  </a:txBody>
+                  <a:tcPr marL="101600" marR="101600" marT="101600" marB="101600" anchor="ctr">
+                    <a:solidFill>
+                      <a:srgbClr val="FFFFFF"/>
+                    </a:solidFill>
+                    <a:lnL w="0">
+                      <a:noFill/>
+                    </a:lnL>
+                    <a:lnR w="0">
+                      <a:noFill/>
+                    </a:lnR>
+                    <a:lnT w="0">
+                      <a:noFill/>
+                    </a:lnT>
+                    <a:lnB w="9525">
+                      <a:solidFill>
+                        <a:srgbClr val="E2E2E2"/>
+                      </a:solidFill>
+                    </a:lnB>
+                  </a:tcPr>
+                </a:tc>
+              </a:tr>
+            </a:tbl>
+          </a:graphicData>
+        </a:graphic>
+      </p:graphicFrame>
+      <p:sp>
+        <p:nvSpPr>
+          <p:cNvPr id="25" name="Slide Number Placeholder 0"/>
+          <p:cNvSpPr>
+            <a:spLocks noGrp="1"/>
+          </p:cNvSpPr>
+          <p:nvPr>
+            <p:ph type="sldNum" sz="quarter" idx="4294967295"/>
+          </p:nvPr>
+        </p:nvSpPr>
+        <p:spPr>
+          <a:xfrm>
+            <a:off x="10591495" y="6355080"/>
+            <a:ext cx="914400" cy="274320"/>
+          </a:xfrm>
+          <a:prstGeom prst="rect">
+            <a:avLst/>
+          </a:prstGeom>
+          <a:extLst>
+            <a:ext uri="{C572A759-6A51-4108-AA02-DFA0A04FC94B}">
+              <ma14:wrappingTextBoxFlag xmlns:ma14="http://schemas.microsoft.com/office/mac/drawingml/2011/main" val="0"/>
+            </a:ext>
+          </a:extLst>
+        </p:spPr>
+        <p:txBody>
+          <a:bodyPr/>
+          <a:lstStyle>
+            <a:lvl1pPr>
+              <a:defRPr sz="1000">
                 <a:solidFill>
                   <a:srgbClr val="AFAFAF"/>
                 </a:solidFill>
-              </a:rPr>
-              <a:t>2.1  </a:t>
-            </a:r>
-            <a:r>
-              <a:t>정답 생성과 데이터 분할</a:t>
-            </a:r>
-          </a:p>
-          <a:p>
-            <a:pPr>
-              <a:spcAft>
-                <a:spcPts val="1000"/>
-              </a:spcAft>
-            </a:pPr>
-            <a:r>
-              <a:rPr>
-                <a:solidFill>
-                  <a:srgbClr val="AFAFAF"/>
-                </a:solidFill>
-              </a:rPr>
-              <a:t>2.2  </a:t>
-            </a:r>
-            <a:r>
-              <a:t>특징 여덟 개</a:t>
-            </a:r>
+                <a:latin typeface="Pretendard Medium"/>
+                <a:ea typeface="Pretendard Medium"/>
+                <a:cs typeface="Pretendard Medium"/>
+              </a:defRPr>
+            </a:lvl1pPr>
+          </a:lstStyle>
+          <a:p>
+            <a:pPr algn="r"/>
+            <a:fld id="{F7021451-1387-4CA6-816F-3879F97B5CBC}" type="slidenum">
+              <a:rPr b="0" lang="en-US"/>
+              <a:t>1008</a:t>
+            </a:fld>
+            <a:endParaRPr lang="en-US"/>
           </a:p>
         </p:txBody>
       </p:sp>
@@ -8784,12 +9280,12 @@
       <p:grpSpPr/>
       <p:sp>
         <p:nvSpPr>
-          <p:cNvPr id="2" name="Title 1"/>
-          <p:cNvSpPr>
-            <a:spLocks noGrp="1"/>
-          </p:cNvSpPr>
-          <p:nvPr>
-            <p:ph type="title" idx="100"/>
+          <p:cNvPr id="2" name="Text Placeholder 1"/>
+          <p:cNvSpPr>
+            <a:spLocks noGrp="1"/>
+          </p:cNvSpPr>
+          <p:nvPr>
+            <p:ph type="body" idx="100"/>
           </p:nvPr>
         </p:nvSpPr>
         <p:spPr/>
@@ -8798,19 +9294,19 @@
           <a:lstStyle/>
           <a:p>
             <a:r>
-              <a:t>2.1 정답 생성과 데이터 분할</a:t>
-            </a:r>
-          </a:p>
-        </p:txBody>
-      </p:sp>
-      <p:sp>
-        <p:nvSpPr>
-          <p:cNvPr id="3" name="Text Placeholder 2"/>
-          <p:cNvSpPr>
-            <a:spLocks noGrp="1"/>
-          </p:cNvSpPr>
-          <p:nvPr>
-            <p:ph type="body" idx="101"/>
+              <a:t>02</a:t>
+            </a:r>
+          </a:p>
+        </p:txBody>
+      </p:sp>
+      <p:sp>
+        <p:nvSpPr>
+          <p:cNvPr id="3" name="Title 2"/>
+          <p:cNvSpPr>
+            <a:spLocks noGrp="1"/>
+          </p:cNvSpPr>
+          <p:nvPr>
+            <p:ph type="title" idx="101"/>
           </p:nvPr>
         </p:nvSpPr>
         <p:spPr/>
@@ -8819,7 +9315,7 @@
           <a:lstStyle/>
           <a:p>
             <a:r>
-              <a:t>2. 교재 9.1 학습 데이터와 특징</a:t>
+              <a:t>교재 9.1 학습 데이터와 특징</a:t>
             </a:r>
           </a:p>
         </p:txBody>
@@ -8839,76 +9335,40 @@
           <a:bodyPr/>
           <a:lstStyle/>
           <a:p>
-            <a:pPr/>
-            <a:r>
-              <a:t>정답 생성 장치: 3장의 다익스트라</a:t>
-            </a:r>
-          </a:p>
-          <a:p>
-            <a:pPr/>
-            <a:r>
-              <a:t>무작위 출발지와 목적지 쌍 2만 건의 실제 소요시간 계산</a:t>
-            </a:r>
-          </a:p>
-          <a:p>
-            <a:pPr/>
-            <a:r>
-              <a:t>학습 80%, 검증 20%로 분할</a:t>
-            </a:r>
-          </a:p>
-          <a:p>
-            <a:pPr/>
-            <a:r>
-              <a:t>검증 데이터를 분리하는 이유: 암기와 일반화를 구분</a:t>
-            </a:r>
-          </a:p>
-        </p:txBody>
-      </p:sp>
-      <p:sp>
-        <p:nvSpPr>
-          <p:cNvPr id="25" name="Slide Number Placeholder 0"/>
-          <p:cNvSpPr>
-            <a:spLocks noGrp="1"/>
-          </p:cNvSpPr>
-          <p:nvPr>
-            <p:ph type="sldNum" sz="quarter" idx="4294967295"/>
-          </p:nvPr>
-        </p:nvSpPr>
-        <p:spPr>
-          <a:xfrm>
-            <a:off x="10591495" y="6355080"/>
-            <a:ext cx="914400" cy="274320"/>
-          </a:xfrm>
-          <a:prstGeom prst="rect">
-            <a:avLst/>
-          </a:prstGeom>
-          <a:extLst>
-            <a:ext uri="{C572A759-6A51-4108-AA02-DFA0A04FC94B}">
-              <ma14:wrappingTextBoxFlag xmlns:ma14="http://schemas.microsoft.com/office/mac/drawingml/2011/main" val="0"/>
-            </a:ext>
-          </a:extLst>
-        </p:spPr>
-        <p:txBody>
-          <a:bodyPr/>
-          <a:lstStyle>
-            <a:lvl1pPr>
-              <a:defRPr sz="1000">
+            <a:pPr>
+              <a:spcAft>
+                <a:spcPts val="1000"/>
+              </a:spcAft>
+            </a:pPr>
+            <a:r>
+              <a:rPr>
                 <a:solidFill>
                   <a:srgbClr val="AFAFAF"/>
                 </a:solidFill>
-                <a:latin typeface="Pretendard Medium"/>
-                <a:ea typeface="Pretendard Medium"/>
-                <a:cs typeface="Pretendard Medium"/>
-              </a:defRPr>
-            </a:lvl1pPr>
-          </a:lstStyle>
-          <a:p>
-            <a:pPr algn="r"/>
-            <a:fld id="{F7021451-1387-4CA6-816F-3879F97B5CBC}" type="slidenum">
-              <a:rPr b="0" lang="en-US"/>
-              <a:t>1004</a:t>
-            </a:fld>
-            <a:endParaRPr lang="en-US"/>
+              </a:rPr>
+              <a:t>2.1  </a:t>
+            </a:r>
+            <a:r>
+              <a:t>정답 생성과 데이터 분할</a:t>
+            </a:r>
+          </a:p>
+          <a:p>
+            <a:pPr>
+              <a:spcAft>
+                <a:spcPts val="1000"/>
+              </a:spcAft>
+            </a:pPr>
+            <a:r>
+              <a:rPr>
+                <a:solidFill>
+                  <a:srgbClr val="AFAFAF"/>
+                </a:solidFill>
+              </a:rPr>
+              <a:t>2.2  </a:t>
+            </a:r>
+            <a:r>
+              <a:t>특징 여덟 개</a:t>
+            </a:r>
           </a:p>
         </p:txBody>
       </p:sp>
@@ -8946,6 +9406,154 @@
           <a:lstStyle/>
           <a:p>
             <a:r>
+              <a:t>2.1 정답 생성과 데이터 분할</a:t>
+            </a:r>
+          </a:p>
+        </p:txBody>
+      </p:sp>
+      <p:sp>
+        <p:nvSpPr>
+          <p:cNvPr id="3" name="Text Placeholder 2"/>
+          <p:cNvSpPr>
+            <a:spLocks noGrp="1"/>
+          </p:cNvSpPr>
+          <p:nvPr>
+            <p:ph type="body" idx="101"/>
+          </p:nvPr>
+        </p:nvSpPr>
+        <p:spPr/>
+        <p:txBody>
+          <a:bodyPr/>
+          <a:lstStyle/>
+          <a:p>
+            <a:r>
+              <a:t>2. 교재 9.1 학습 데이터와 특징</a:t>
+            </a:r>
+          </a:p>
+        </p:txBody>
+      </p:sp>
+      <p:sp>
+        <p:nvSpPr>
+          <p:cNvPr id="4" name="Text Placeholder 3"/>
+          <p:cNvSpPr>
+            <a:spLocks noGrp="1"/>
+          </p:cNvSpPr>
+          <p:nvPr>
+            <p:ph type="body" idx="102"/>
+          </p:nvPr>
+        </p:nvSpPr>
+        <p:spPr/>
+        <p:txBody>
+          <a:bodyPr/>
+          <a:lstStyle/>
+          <a:p>
+            <a:pPr/>
+            <a:r>
+              <a:t>정답 생성 장치: 3장의 다익스트라</a:t>
+            </a:r>
+          </a:p>
+          <a:p>
+            <a:pPr/>
+            <a:r>
+              <a:t>무작위 출발지와 목적지 쌍 2만 건의 실제 소요시간 계산</a:t>
+            </a:r>
+          </a:p>
+          <a:p>
+            <a:pPr/>
+            <a:r>
+              <a:t>학습 80%, 검증 20%로 분할</a:t>
+            </a:r>
+          </a:p>
+          <a:p>
+            <a:pPr/>
+            <a:r>
+              <a:t>검증 데이터를 분리하는 이유: 암기와 일반화를 구분</a:t>
+            </a:r>
+          </a:p>
+        </p:txBody>
+      </p:sp>
+      <p:sp>
+        <p:nvSpPr>
+          <p:cNvPr id="25" name="Slide Number Placeholder 0"/>
+          <p:cNvSpPr>
+            <a:spLocks noGrp="1"/>
+          </p:cNvSpPr>
+          <p:nvPr>
+            <p:ph type="sldNum" sz="quarter" idx="4294967295"/>
+          </p:nvPr>
+        </p:nvSpPr>
+        <p:spPr>
+          <a:xfrm>
+            <a:off x="10591495" y="6355080"/>
+            <a:ext cx="914400" cy="274320"/>
+          </a:xfrm>
+          <a:prstGeom prst="rect">
+            <a:avLst/>
+          </a:prstGeom>
+          <a:extLst>
+            <a:ext uri="{C572A759-6A51-4108-AA02-DFA0A04FC94B}">
+              <ma14:wrappingTextBoxFlag xmlns:ma14="http://schemas.microsoft.com/office/mac/drawingml/2011/main" val="0"/>
+            </a:ext>
+          </a:extLst>
+        </p:spPr>
+        <p:txBody>
+          <a:bodyPr/>
+          <a:lstStyle>
+            <a:lvl1pPr>
+              <a:defRPr sz="1000">
+                <a:solidFill>
+                  <a:srgbClr val="AFAFAF"/>
+                </a:solidFill>
+                <a:latin typeface="Pretendard Medium"/>
+                <a:ea typeface="Pretendard Medium"/>
+                <a:cs typeface="Pretendard Medium"/>
+              </a:defRPr>
+            </a:lvl1pPr>
+          </a:lstStyle>
+          <a:p>
+            <a:pPr algn="r"/>
+            <a:fld id="{F7021451-1387-4CA6-816F-3879F97B5CBC}" type="slidenum">
+              <a:rPr b="0" lang="en-US"/>
+              <a:t>1004</a:t>
+            </a:fld>
+            <a:endParaRPr lang="en-US"/>
+          </a:p>
+        </p:txBody>
+      </p:sp>
+    </p:spTree>
+  </p:cSld>
+  <p:clrMapOvr>
+    <a:masterClrMapping/>
+  </p:clrMapOvr>
+</p:sld>
+</file>
+
+<file path=ppt/slides/slide9.xml><?xml version="1.0" encoding="utf-8"?>
+<p:sld xmlns:a="http://schemas.openxmlformats.org/drawingml/2006/main" xmlns:p="http://schemas.openxmlformats.org/presentationml/2006/main" xmlns:r="http://schemas.openxmlformats.org/officeDocument/2006/relationships">
+  <p:cSld>
+    <p:spTree>
+      <p:nvGrpSpPr>
+        <p:cNvPr id="1" name=""/>
+        <p:cNvGrpSpPr/>
+        <p:nvPr/>
+      </p:nvGrpSpPr>
+      <p:grpSpPr/>
+      <p:sp>
+        <p:nvSpPr>
+          <p:cNvPr id="2" name="Title 1"/>
+          <p:cNvSpPr>
+            <a:spLocks noGrp="1"/>
+          </p:cNvSpPr>
+          <p:nvPr>
+            <p:ph type="title" idx="100"/>
+          </p:nvPr>
+        </p:nvSpPr>
+        <p:spPr/>
+        <p:txBody>
+          <a:bodyPr/>
+          <a:lstStyle/>
+          <a:p>
+            <a:r>
               <a:t>2.2 특징 여덟 개</a:t>
             </a:r>
           </a:p>
@@ -9028,7 +9636,7 @@
           <a:lstStyle/>
           <a:p>
             <a:r>
-              <a:t>표 1. 예측에 사용하는 특징과 선택 이유</a:t>
+              <a:t>표 2. 예측에 사용하는 특징과 선택 이유</a:t>
             </a:r>
           </a:p>
         </p:txBody>
@@ -9470,118 +10078,6 @@
               <a:t>1008</a:t>
             </a:fld>
             <a:endParaRPr lang="en-US"/>
-          </a:p>
-        </p:txBody>
-      </p:sp>
-    </p:spTree>
-  </p:cSld>
-  <p:clrMapOvr>
-    <a:masterClrMapping/>
-  </p:clrMapOvr>
-</p:sld>
-</file>
-
-<file path=ppt/slides/slide9.xml><?xml version="1.0" encoding="utf-8"?>
-<p:sld xmlns:a="http://schemas.openxmlformats.org/drawingml/2006/main" xmlns:p="http://schemas.openxmlformats.org/presentationml/2006/main" xmlns:r="http://schemas.openxmlformats.org/officeDocument/2006/relationships">
-  <p:cSld>
-    <p:spTree>
-      <p:nvGrpSpPr>
-        <p:cNvPr id="1" name=""/>
-        <p:cNvGrpSpPr/>
-        <p:nvPr/>
-      </p:nvGrpSpPr>
-      <p:grpSpPr/>
-      <p:sp>
-        <p:nvSpPr>
-          <p:cNvPr id="2" name="Text Placeholder 1"/>
-          <p:cNvSpPr>
-            <a:spLocks noGrp="1"/>
-          </p:cNvSpPr>
-          <p:nvPr>
-            <p:ph type="body" idx="100"/>
-          </p:nvPr>
-        </p:nvSpPr>
-        <p:spPr/>
-        <p:txBody>
-          <a:bodyPr/>
-          <a:lstStyle/>
-          <a:p>
-            <a:r>
-              <a:t>03</a:t>
-            </a:r>
-          </a:p>
-        </p:txBody>
-      </p:sp>
-      <p:sp>
-        <p:nvSpPr>
-          <p:cNvPr id="3" name="Title 2"/>
-          <p:cNvSpPr>
-            <a:spLocks noGrp="1"/>
-          </p:cNvSpPr>
-          <p:nvPr>
-            <p:ph type="title" idx="101"/>
-          </p:nvPr>
-        </p:nvSpPr>
-        <p:spPr/>
-        <p:txBody>
-          <a:bodyPr/>
-          <a:lstStyle/>
-          <a:p>
-            <a:r>
-              <a:t>교재 9.2–9.3 기준선과 선형회귀</a:t>
-            </a:r>
-          </a:p>
-        </p:txBody>
-      </p:sp>
-      <p:sp>
-        <p:nvSpPr>
-          <p:cNvPr id="4" name="Text Placeholder 3"/>
-          <p:cNvSpPr>
-            <a:spLocks noGrp="1"/>
-          </p:cNvSpPr>
-          <p:nvPr>
-            <p:ph type="body" idx="102"/>
-          </p:nvPr>
-        </p:nvSpPr>
-        <p:spPr/>
-        <p:txBody>
-          <a:bodyPr/>
-          <a:lstStyle/>
-          <a:p>
-            <a:pPr>
-              <a:spcAft>
-                <a:spcPts val="1000"/>
-              </a:spcAft>
-            </a:pPr>
-            <a:r>
-              <a:rPr>
-                <a:solidFill>
-                  <a:srgbClr val="AFAFAF"/>
-                </a:solidFill>
-              </a:rPr>
-              <a:t>3.1  </a:t>
-            </a:r>
-            <a:r>
-              <a:t>기준선과 평가 지표</a:t>
-            </a:r>
-          </a:p>
-          <a:p>
-            <a:pPr>
-              <a:spcAft>
-                <a:spcPts val="1000"/>
-              </a:spcAft>
-            </a:pPr>
-            <a:r>
-              <a:rPr>
-                <a:solidFill>
-                  <a:srgbClr val="AFAFAF"/>
-                </a:solidFill>
-              </a:rPr>
-              <a:t>3.2  </a:t>
-            </a:r>
-            <a:r>
-              <a:t>선형회귀의 한계</a:t>
-            </a:r>
           </a:p>
         </p:txBody>
       </p:sp>
